--- a/curso/pptx/S66.pptx
+++ b/curso/pptx/S66.pptx
@@ -471,426 +471,6 @@
     </a:lvl9pPr>
   </p:notesStyle>
 </p:notesMaster>
-</file>
-
-<file path=ppt/notesSlides/notesSlide1.xml><?xml version="1.0" encoding="utf-8"?>
-<p:notes xmlns:a="http://schemas.openxmlformats.org/drawingml/2006/main" xmlns:p="http://schemas.openxmlformats.org/presentationml/2006/main" xmlns:r="http://schemas.openxmlformats.org/officeDocument/2006/relationships">
-  <p:cSld>
-    <p:spTree>
-      <p:nvGrpSpPr>
-        <p:cNvPr id="1" name=""/>
-        <p:cNvGrpSpPr/>
-        <p:nvPr/>
-      </p:nvGrpSpPr>
-      <p:grpSpPr>
-        <a:xfrm>
-          <a:off x="0" y="0"/>
-          <a:ext cx="0" cy="0"/>
-          <a:chOff x="0" y="0"/>
-          <a:chExt cx="0" cy="0"/>
-        </a:xfrm>
-      </p:grpSpPr>
-      <p:sp>
-        <p:nvSpPr>
-          <p:cNvPr id="2" name="Slide Image Placeholder 1"/>
-          <p:cNvSpPr>
-            <a:spLocks noGrp="1"/>
-          </p:cNvSpPr>
-          <p:nvPr>
-            <p:ph type="sldImg" idx="2"/>
-          </p:nvPr>
-        </p:nvSpPr>
-        <p:spPr/>
-      </p:sp>
-      <p:sp>
-        <p:nvSpPr>
-          <p:cNvPr id="3" name="Notes Placeholder 2"/>
-          <p:cNvSpPr>
-            <a:spLocks noGrp="1"/>
-          </p:cNvSpPr>
-          <p:nvPr>
-            <p:ph type="body" idx="3" sz="quarter"/>
-          </p:nvPr>
-        </p:nvSpPr>
-        <p:spPr/>
-        <p:txBody>
-          <a:bodyPr/>
-          <a:lstStyle/>
-          <a:p>
-            <a:r>
-              <a:t>3 minutos. Sin apuntes. Es para recordar, no cuenta para nota.</a:t>
-            </a:r>
-          </a:p>
-        </p:txBody>
-      </p:sp>
-      <p:sp>
-        <p:nvSpPr>
-          <p:cNvPr id="4" name="Slide Number Placeholder 3"/>
-          <p:cNvSpPr>
-            <a:spLocks noGrp="1"/>
-          </p:cNvSpPr>
-          <p:nvPr>
-            <p:ph type="sldNum" idx="5" sz="quarter"/>
-          </p:nvPr>
-        </p:nvSpPr>
-        <p:spPr/>
-      </p:sp>
-    </p:spTree>
-  </p:cSld>
-  <p:clrMapOvr>
-    <a:masterClrMapping/>
-  </p:clrMapOvr>
-</p:notes>
-</file>
-
-<file path=ppt/notesSlides/notesSlide2.xml><?xml version="1.0" encoding="utf-8"?>
-<p:notes xmlns:a="http://schemas.openxmlformats.org/drawingml/2006/main" xmlns:p="http://schemas.openxmlformats.org/presentationml/2006/main" xmlns:r="http://schemas.openxmlformats.org/officeDocument/2006/relationships">
-  <p:cSld>
-    <p:spTree>
-      <p:nvGrpSpPr>
-        <p:cNvPr id="1" name=""/>
-        <p:cNvGrpSpPr/>
-        <p:nvPr/>
-      </p:nvGrpSpPr>
-      <p:grpSpPr>
-        <a:xfrm>
-          <a:off x="0" y="0"/>
-          <a:ext cx="0" cy="0"/>
-          <a:chOff x="0" y="0"/>
-          <a:chExt cx="0" cy="0"/>
-        </a:xfrm>
-      </p:grpSpPr>
-      <p:sp>
-        <p:nvSpPr>
-          <p:cNvPr id="2" name="Slide Image Placeholder 1"/>
-          <p:cNvSpPr>
-            <a:spLocks noGrp="1"/>
-          </p:cNvSpPr>
-          <p:nvPr>
-            <p:ph type="sldImg" idx="2"/>
-          </p:nvPr>
-        </p:nvSpPr>
-        <p:spPr/>
-      </p:sp>
-      <p:sp>
-        <p:nvSpPr>
-          <p:cNvPr id="3" name="Notes Placeholder 2"/>
-          <p:cNvSpPr>
-            <a:spLocks noGrp="1"/>
-          </p:cNvSpPr>
-          <p:nvPr>
-            <p:ph type="body" idx="3" sz="quarter"/>
-          </p:nvPr>
-        </p:nvSpPr>
-        <p:spPr/>
-        <p:txBody>
-          <a:bodyPr/>
-          <a:lstStyle/>
-          <a:p>
-            <a:r>
-              <a:t>3 minutos. Sin apuntes. Es para recordar, no cuenta para nota.</a:t>
-            </a:r>
-          </a:p>
-        </p:txBody>
-      </p:sp>
-      <p:sp>
-        <p:nvSpPr>
-          <p:cNvPr id="4" name="Slide Number Placeholder 3"/>
-          <p:cNvSpPr>
-            <a:spLocks noGrp="1"/>
-          </p:cNvSpPr>
-          <p:nvPr>
-            <p:ph type="sldNum" idx="5" sz="quarter"/>
-          </p:nvPr>
-        </p:nvSpPr>
-        <p:spPr/>
-      </p:sp>
-    </p:spTree>
-  </p:cSld>
-  <p:clrMapOvr>
-    <a:masterClrMapping/>
-  </p:clrMapOvr>
-</p:notes>
-</file>
-
-<file path=ppt/notesSlides/notesSlide3.xml><?xml version="1.0" encoding="utf-8"?>
-<p:notes xmlns:a="http://schemas.openxmlformats.org/drawingml/2006/main" xmlns:p="http://schemas.openxmlformats.org/presentationml/2006/main" xmlns:r="http://schemas.openxmlformats.org/officeDocument/2006/relationships">
-  <p:cSld>
-    <p:spTree>
-      <p:nvGrpSpPr>
-        <p:cNvPr id="1" name=""/>
-        <p:cNvGrpSpPr/>
-        <p:nvPr/>
-      </p:nvGrpSpPr>
-      <p:grpSpPr>
-        <a:xfrm>
-          <a:off x="0" y="0"/>
-          <a:ext cx="0" cy="0"/>
-          <a:chOff x="0" y="0"/>
-          <a:chExt cx="0" cy="0"/>
-        </a:xfrm>
-      </p:grpSpPr>
-      <p:sp>
-        <p:nvSpPr>
-          <p:cNvPr id="2" name="Slide Image Placeholder 1"/>
-          <p:cNvSpPr>
-            <a:spLocks noGrp="1"/>
-          </p:cNvSpPr>
-          <p:nvPr>
-            <p:ph type="sldImg" idx="2"/>
-          </p:nvPr>
-        </p:nvSpPr>
-        <p:spPr/>
-      </p:sp>
-      <p:sp>
-        <p:nvSpPr>
-          <p:cNvPr id="3" name="Notes Placeholder 2"/>
-          <p:cNvSpPr>
-            <a:spLocks noGrp="1"/>
-          </p:cNvSpPr>
-          <p:nvPr>
-            <p:ph type="body" idx="3" sz="quarter"/>
-          </p:nvPr>
-        </p:nvSpPr>
-        <p:spPr/>
-        <p:txBody>
-          <a:bodyPr/>
-          <a:lstStyle/>
-          <a:p>
-            <a:r>
-              <a:t>Nadie tiene que contestar: solo pensarlo.</a:t>
-            </a:r>
-          </a:p>
-        </p:txBody>
-      </p:sp>
-      <p:sp>
-        <p:nvSpPr>
-          <p:cNvPr id="4" name="Slide Number Placeholder 3"/>
-          <p:cNvSpPr>
-            <a:spLocks noGrp="1"/>
-          </p:cNvSpPr>
-          <p:nvPr>
-            <p:ph type="sldNum" idx="5" sz="quarter"/>
-          </p:nvPr>
-        </p:nvSpPr>
-        <p:spPr/>
-      </p:sp>
-    </p:spTree>
-  </p:cSld>
-  <p:clrMapOvr>
-    <a:masterClrMapping/>
-  </p:clrMapOvr>
-</p:notes>
-</file>
-
-<file path=ppt/notesSlides/notesSlide4.xml><?xml version="1.0" encoding="utf-8"?>
-<p:notes xmlns:a="http://schemas.openxmlformats.org/drawingml/2006/main" xmlns:p="http://schemas.openxmlformats.org/presentationml/2006/main" xmlns:r="http://schemas.openxmlformats.org/officeDocument/2006/relationships">
-  <p:cSld>
-    <p:spTree>
-      <p:nvGrpSpPr>
-        <p:cNvPr id="1" name=""/>
-        <p:cNvGrpSpPr/>
-        <p:nvPr/>
-      </p:nvGrpSpPr>
-      <p:grpSpPr>
-        <a:xfrm>
-          <a:off x="0" y="0"/>
-          <a:ext cx="0" cy="0"/>
-          <a:chOff x="0" y="0"/>
-          <a:chExt cx="0" cy="0"/>
-        </a:xfrm>
-      </p:grpSpPr>
-      <p:sp>
-        <p:nvSpPr>
-          <p:cNvPr id="2" name="Slide Image Placeholder 1"/>
-          <p:cNvSpPr>
-            <a:spLocks noGrp="1"/>
-          </p:cNvSpPr>
-          <p:nvPr>
-            <p:ph type="sldImg" idx="2"/>
-          </p:nvPr>
-        </p:nvSpPr>
-        <p:spPr/>
-      </p:sp>
-      <p:sp>
-        <p:nvSpPr>
-          <p:cNvPr id="3" name="Notes Placeholder 2"/>
-          <p:cNvSpPr>
-            <a:spLocks noGrp="1"/>
-          </p:cNvSpPr>
-          <p:nvPr>
-            <p:ph type="body" idx="3" sz="quarter"/>
-          </p:nvPr>
-        </p:nvSpPr>
-        <p:spPr/>
-        <p:txBody>
-          <a:bodyPr/>
-          <a:lstStyle/>
-          <a:p>
-            <a:r>
-              <a:t>Dejar unos segundos para que piensen la respuesta fácil antes de enseñar los pasos.</a:t>
-            </a:r>
-          </a:p>
-        </p:txBody>
-      </p:sp>
-      <p:sp>
-        <p:nvSpPr>
-          <p:cNvPr id="4" name="Slide Number Placeholder 3"/>
-          <p:cNvSpPr>
-            <a:spLocks noGrp="1"/>
-          </p:cNvSpPr>
-          <p:nvPr>
-            <p:ph type="sldNum" idx="5" sz="quarter"/>
-          </p:nvPr>
-        </p:nvSpPr>
-        <p:spPr/>
-      </p:sp>
-    </p:spTree>
-  </p:cSld>
-  <p:clrMapOvr>
-    <a:masterClrMapping/>
-  </p:clrMapOvr>
-</p:notes>
-</file>
-
-<file path=ppt/notesSlides/notesSlide5.xml><?xml version="1.0" encoding="utf-8"?>
-<p:notes xmlns:a="http://schemas.openxmlformats.org/drawingml/2006/main" xmlns:p="http://schemas.openxmlformats.org/presentationml/2006/main" xmlns:r="http://schemas.openxmlformats.org/officeDocument/2006/relationships">
-  <p:cSld>
-    <p:spTree>
-      <p:nvGrpSpPr>
-        <p:cNvPr id="1" name=""/>
-        <p:cNvGrpSpPr/>
-        <p:nvPr/>
-      </p:nvGrpSpPr>
-      <p:grpSpPr>
-        <a:xfrm>
-          <a:off x="0" y="0"/>
-          <a:ext cx="0" cy="0"/>
-          <a:chOff x="0" y="0"/>
-          <a:chExt cx="0" cy="0"/>
-        </a:xfrm>
-      </p:grpSpPr>
-      <p:sp>
-        <p:nvSpPr>
-          <p:cNvPr id="2" name="Slide Image Placeholder 1"/>
-          <p:cNvSpPr>
-            <a:spLocks noGrp="1"/>
-          </p:cNvSpPr>
-          <p:nvPr>
-            <p:ph type="sldImg" idx="2"/>
-          </p:nvPr>
-        </p:nvSpPr>
-        <p:spPr/>
-      </p:sp>
-      <p:sp>
-        <p:nvSpPr>
-          <p:cNvPr id="3" name="Notes Placeholder 2"/>
-          <p:cNvSpPr>
-            <a:spLocks noGrp="1"/>
-          </p:cNvSpPr>
-          <p:nvPr>
-            <p:ph type="body" idx="3" sz="quarter"/>
-          </p:nvPr>
-        </p:nvSpPr>
-        <p:spPr/>
-        <p:txBody>
-          <a:bodyPr/>
-          <a:lstStyle/>
-          <a:p>
-            <a:r>
-              <a:t>Dejar 2 minutos para que lo escriban. La diapositiva siguiente muestra el resumen.</a:t>
-            </a:r>
-          </a:p>
-        </p:txBody>
-      </p:sp>
-      <p:sp>
-        <p:nvSpPr>
-          <p:cNvPr id="4" name="Slide Number Placeholder 3"/>
-          <p:cNvSpPr>
-            <a:spLocks noGrp="1"/>
-          </p:cNvSpPr>
-          <p:nvPr>
-            <p:ph type="sldNum" idx="5" sz="quarter"/>
-          </p:nvPr>
-        </p:nvSpPr>
-        <p:spPr/>
-      </p:sp>
-    </p:spTree>
-  </p:cSld>
-  <p:clrMapOvr>
-    <a:masterClrMapping/>
-  </p:clrMapOvr>
-</p:notes>
-</file>
-
-<file path=ppt/notesSlides/notesSlide6.xml><?xml version="1.0" encoding="utf-8"?>
-<p:notes xmlns:a="http://schemas.openxmlformats.org/drawingml/2006/main" xmlns:p="http://schemas.openxmlformats.org/presentationml/2006/main" xmlns:r="http://schemas.openxmlformats.org/officeDocument/2006/relationships">
-  <p:cSld>
-    <p:spTree>
-      <p:nvGrpSpPr>
-        <p:cNvPr id="1" name=""/>
-        <p:cNvGrpSpPr/>
-        <p:nvPr/>
-      </p:nvGrpSpPr>
-      <p:grpSpPr>
-        <a:xfrm>
-          <a:off x="0" y="0"/>
-          <a:ext cx="0" cy="0"/>
-          <a:chOff x="0" y="0"/>
-          <a:chExt cx="0" cy="0"/>
-        </a:xfrm>
-      </p:grpSpPr>
-      <p:sp>
-        <p:nvSpPr>
-          <p:cNvPr id="2" name="Slide Image Placeholder 1"/>
-          <p:cNvSpPr>
-            <a:spLocks noGrp="1"/>
-          </p:cNvSpPr>
-          <p:nvPr>
-            <p:ph type="sldImg" idx="2"/>
-          </p:nvPr>
-        </p:nvSpPr>
-        <p:spPr/>
-      </p:sp>
-      <p:sp>
-        <p:nvSpPr>
-          <p:cNvPr id="3" name="Notes Placeholder 2"/>
-          <p:cNvSpPr>
-            <a:spLocks noGrp="1"/>
-          </p:cNvSpPr>
-          <p:nvPr>
-            <p:ph type="body" idx="3" sz="quarter"/>
-          </p:nvPr>
-        </p:nvSpPr>
-        <p:spPr/>
-        <p:txBody>
-          <a:bodyPr/>
-          <a:lstStyle/>
-          <a:p>
-            <a:r>
-              <a:t>Buscar: «Tajfel grupo mínimo experimento» · «pensamiento de grupo Janis explicado»</a:t>
-            </a:r>
-          </a:p>
-        </p:txBody>
-      </p:sp>
-      <p:sp>
-        <p:nvSpPr>
-          <p:cNvPr id="4" name="Slide Number Placeholder 3"/>
-          <p:cNvSpPr>
-            <a:spLocks noGrp="1"/>
-          </p:cNvSpPr>
-          <p:nvPr>
-            <p:ph type="sldNum" idx="5" sz="quarter"/>
-          </p:nvPr>
-        </p:nvSpPr>
-        <p:spPr/>
-      </p:sp>
-    </p:spTree>
-  </p:cSld>
-  <p:clrMapOvr>
-    <a:masterClrMapping/>
-  </p:clrMapOvr>
-</p:notes>
 </file>
 
 <file path=ppt/slideLayouts/slideLayout1.xml><?xml version="1.0" encoding="utf-8"?>

--- a/curso/pptx/S66.pptx
+++ b/curso/pptx/S66.pptx
@@ -3799,7 +3799,7 @@
                 </a:solidFill>
                 <a:latin typeface="Nunito Sans"/>
               </a:rPr>
-              <a:t>Iker propone subir a Artxanda en bici. Anuncian tormenta. Maialen y Omar lo ven en el móvil, pero callan: el grupo está muy animado y no quieren cortar el rollo.</a:t>
+              <a:t>Un chico propone subir a Artxanda en bici. Anuncian tormenta. Dos del grupo lo ven en el móvil, pero callan: el grupo está muy animado y no quieren cortar el rollo.</a:t>
             </a:r>
           </a:p>
         </p:txBody>
@@ -3847,7 +3847,7 @@
                 </a:solidFill>
                 <a:latin typeface="Nunito Sans"/>
               </a:rPr>
-              <a:t>¿Había dudas en el grupo? Sí: Maialen y Omar sabían lo de la tormenta.</a:t>
+              <a:t>¿Había dudas en el grupo? Sí: dos del grupo sabían lo de la tormenta.</a:t>
             </a:r>
           </a:p>
           <a:p>
@@ -4212,7 +4212,7 @@
                 </a:solidFill>
                 <a:latin typeface="Nunito Sans"/>
               </a:rPr>
-              <a:t>Así cuentan también las ideas de los tímidos, y no mandan siempre los mismos</a:t>
+              <a:t>Así cuentan también las ideas de quien habla menos, y no mandan siempre los mismos</a:t>
             </a:r>
           </a:p>
           <a:p>
@@ -4457,7 +4457,7 @@
                 </a:solidFill>
                 <a:latin typeface="Nunito Sans"/>
               </a:rPr>
-              <a:t>Iker es del Athletic. Cuando gana, lo celebra con sus amigos; cuando pierde, se pone triste. Siente un «nosotros» muy fuerte.</a:t>
+              <a:t>Un chico es del Athletic. Cuando gana, lo celebra con sus amigos; cuando pierde, se pone triste. Siente un «nosotros» muy fuerte.</a:t>
             </a:r>
           </a:p>
         </p:txBody>
@@ -5737,7 +5737,7 @@
                 </a:solidFill>
                 <a:latin typeface="Nunito Sans"/>
               </a:rPr>
-              <a:t>En el campamento de Sherif, ______ por premios unió a cada grupo por dentro, pero los enfrentó.  (sesión 65)</a:t>
+              <a:t>En el campamento de los dos equipos, ______ por premios unió a cada grupo por dentro, pero los enfrentó.  (sesión 65)</a:t>
             </a:r>
           </a:p>
           <a:p>
@@ -5957,7 +5957,7 @@
                 </a:solidFill>
                 <a:latin typeface="Nunito Sans"/>
               </a:rPr>
-              <a:t>En el campamento de Sherif, </a:t>
+              <a:t>En el campamento de los dos equipos, </a:t>
             </a:r>
             <a:r>
               <a:rPr sz="2600" b="1">

--- a/curso/pptx/S66.pptx
+++ b/curso/pptx/S66.pptx
@@ -4271,7 +4271,7 @@
                 </a:solidFill>
                 <a:latin typeface="Nunito Sans"/>
               </a:rPr>
-              <a:t>Se juzga la propuesta, no a quien la hizo (sesión 14: ad hominem)</a:t>
+              <a:t>Se juzga la propuesta, no a quien la hizo (sesión 20: ad hominem)</a:t>
             </a:r>
           </a:p>
         </p:txBody>
@@ -6619,7 +6619,7 @@
                 </a:solidFill>
                 <a:latin typeface="Nunito Sans"/>
               </a:rPr>
-              <a:t>Puede acabar en estereotipos: ideas fijas sobre «ellos» (sesión 19)</a:t>
+              <a:t>Puede acabar en estereotipos: ideas fijas sobre «ellos» (sesión 25)</a:t>
             </a:r>
           </a:p>
         </p:txBody>
@@ -7352,7 +7352,7 @@
                 </a:solidFill>
                 <a:latin typeface="Nunito Sans"/>
               </a:rPr>
-              <a:t>Recuerda la sesión 29: la conformidad de Asch</a:t>
+              <a:t>Recuerda la sesión 10: la conformidad de Asch</a:t>
             </a:r>
           </a:p>
         </p:txBody>
